--- a/docs/deck/NetChain-DeepDive.pptx
+++ b/docs/deck/NetChain-DeepDive.pptx
@@ -5230,7 +5230,7 @@
                 <a:ea typeface="Segoe UI" pitchFamily="34" charset="-122"/>
                 <a:cs typeface="Segoe UI" pitchFamily="34" charset="-120"/>
               </a:rPr>
-              <a:t>No public explorer can show it, sub-transaction contents are private by design; the operator-scoped verify IS the explorer.</a:t>
+              <a:t>Look it up on Lighthouse (a public Canton explorer): the updateId resolves to its envelope, verdict ACCEPTED, round, acting parties; only the amounts stay private.</a:t>
             </a:r>
             <a:endParaRPr lang="en-US" sz="1250" dirty="0"/>
           </a:p>
